--- a/report/2026_09_02_competitive_report_within_2km.pptx
+++ b/report/2026_09_02_competitive_report_within_2km.pptx
@@ -3995,11 +3995,52 @@
               </a:defRPr>
             </a:pPr>
             <a:r>
-              <a:t>ヤマダストアーの大丸梅田店出店は、いかりJR大阪店にとって直接的かつ大きな影響をもたらすと考えられます。同店舗は駅利用客や周辺の富裕層をターゲットとしており、高品質な食材を強みとするヤマダストアーとの顧客争奪戦が予想されます。品揃えや価格戦略だけでなく、百貨店テナントとしての付加価値提供において差別化を図る必要があります。</a:t>
-            </a:r>
-            <a:br/>
-            <a:r>
-              <a:t>宝塚市伊孑志へのヤマダストアー出店は、いかり宝塚店といかり阪急逆瀬川店に影響を与えるでしょう。ヤマダストアーは品質重視の高級スーパーとして知られており、いかりスーパーの顧客層と重なる部分が大きいです。既存顧客の維持、新規顧客の獲得に向けたプロモーション強化や、地域に密着したサービス、商品のさらなる拡充が求められます。</a:t>
+              <a:t>1. いかりJR大阪店</a:t>
+            </a:r>
+          </a:p>
+          <a:p>
+            <a:pPr>
+              <a:spcAft>
+                <a:spcPts val="1200"/>
+              </a:spcAft>
+              <a:defRPr sz="1350">
+                <a:solidFill>
+                  <a:srgbClr val="1E1E1E"/>
+                </a:solidFill>
+              </a:defRPr>
+            </a:pPr>
+            <a:r>
+              <a:t>*   ヤマダストアーの大丸梅田店出店は、いかりJR大阪店にとって直接的かつ大きな影響をもたらすと考えられます。同店舗は駅利用客や周辺の富裕層をターゲットとしており、高品質な食材を強みとするヤマダストアーとの顧客争奪戦が予想されます。品揃えや価格戦略だけでなく、百貨店テナントとしての付加価値提供において差別化を図る必要があります。</a:t>
+            </a:r>
+          </a:p>
+          <a:p>
+            <a:pPr>
+              <a:spcAft>
+                <a:spcPts val="1200"/>
+              </a:spcAft>
+              <a:defRPr sz="1350">
+                <a:solidFill>
+                  <a:srgbClr val="1E1E1E"/>
+                </a:solidFill>
+              </a:defRPr>
+            </a:pPr>
+            <a:r>
+              <a:t>2. いかり宝塚店、いかり阪急逆瀬川店</a:t>
+            </a:r>
+          </a:p>
+          <a:p>
+            <a:pPr>
+              <a:spcAft>
+                <a:spcPts val="1200"/>
+              </a:spcAft>
+              <a:defRPr sz="1350">
+                <a:solidFill>
+                  <a:srgbClr val="1E1E1E"/>
+                </a:solidFill>
+              </a:defRPr>
+            </a:pPr>
+            <a:r>
+              <a:t>*   宝塚市伊孑志へのヤマダストアー出店は、いかり宝塚店といかり阪急逆瀬川店に影響を与えるでしょう。ヤマダストアーは品質重視の高級スーパーとして知られており、いかりスーパーの顧客層と重なる部分が大きいです。既存顧客の維持、新規顧客の獲得に向けたプロモーション強化や、地域に密着したサービス、商品のさらなる拡充が求められます。</a:t>
             </a:r>
           </a:p>
         </p:txBody>
